--- a/manuscript/figures_en.pptx
+++ b/manuscript/figures_en.pptx
@@ -10,6 +10,12 @@
     <p:sldId id="258" r:id="rId9"/>
     <p:sldId id="259" r:id="rId10"/>
     <p:sldId id="260" r:id="rId11"/>
+    <p:sldId id="261" r:id="rId12"/>
+    <p:sldId id="262" r:id="rId13"/>
+    <p:sldId id="263" r:id="rId14"/>
+    <p:sldId id="264" r:id="rId15"/>
+    <p:sldId id="265" r:id="rId16"/>
+    <p:sldId id="266" r:id="rId17"/>
   </p:sldIdLst>
   <p:sldSz cx="12191695" cy="6858000" type="screen4x3"/>
   <p:notesSz cx="6858000" cy="9144000"/>
@@ -3186,6 +3192,214 @@
 </p:sld>
 </file>
 
+<file path=ppt/slides/slide10.xml><?xml version="1.0" encoding="utf-8"?>
+<p:sld xmlns:a="http://schemas.openxmlformats.org/drawingml/2006/main" xmlns:p="http://schemas.openxmlformats.org/presentationml/2006/main" xmlns:r="http://schemas.openxmlformats.org/officeDocument/2006/relationships">
+  <p:cSld>
+    <p:spTree>
+      <p:nvGrpSpPr>
+        <p:cNvPr id="1" name=""/>
+        <p:cNvGrpSpPr/>
+        <p:nvPr/>
+      </p:nvGrpSpPr>
+      <p:grpSpPr/>
+      <p:sp>
+        <p:nvSpPr>
+          <p:cNvPr id="2" name="TextBox 1"/>
+          <p:cNvSpPr txBox="1"/>
+          <p:nvPr/>
+        </p:nvSpPr>
+        <p:spPr>
+          <a:xfrm>
+            <a:off x="365760" y="182880"/>
+            <a:ext cx="11430000" cy="548640"/>
+          </a:xfrm>
+          <a:prstGeom prst="rect">
+            <a:avLst/>
+          </a:prstGeom>
+          <a:noFill/>
+        </p:spPr>
+        <p:txBody>
+          <a:bodyPr wrap="square">
+            <a:spAutoFit/>
+          </a:bodyPr>
+          <a:lstStyle/>
+          <a:p>
+            <a:r>
+              <a:rPr sz="2000" b="1"/>
+              <a:t>Fig. 10. Solow-residual decomposition: M0 vs tempo-adjusted (M2) vs joint (M4) for six representative countries.</a:t>
+            </a:r>
+          </a:p>
+        </p:txBody>
+      </p:sp>
+      <p:pic>
+        <p:nvPicPr>
+          <p:cNvPr id="3" name="Picture 2" descr="fig10_solow_decomp_en.png"/>
+          <p:cNvPicPr>
+            <a:picLocks noChangeAspect="1"/>
+          </p:cNvPicPr>
+          <p:nvPr/>
+        </p:nvPicPr>
+        <p:blipFill>
+          <a:blip r:embed="rId2"/>
+          <a:stretch>
+            <a:fillRect/>
+          </a:stretch>
+        </p:blipFill>
+        <p:spPr>
+          <a:xfrm>
+            <a:off x="1371600" y="1005840"/>
+            <a:ext cx="9418320" cy="5120640"/>
+          </a:xfrm>
+          <a:prstGeom prst="rect">
+            <a:avLst/>
+          </a:prstGeom>
+        </p:spPr>
+      </p:pic>
+      <p:sp>
+        <p:nvSpPr>
+          <p:cNvPr id="4" name="TextBox 3"/>
+          <p:cNvSpPr txBox="1"/>
+          <p:nvPr/>
+        </p:nvSpPr>
+        <p:spPr>
+          <a:xfrm>
+            <a:off x="365760" y="6263640"/>
+            <a:ext cx="11430000" cy="457200"/>
+          </a:xfrm>
+          <a:prstGeom prst="rect">
+            <a:avLst/>
+          </a:prstGeom>
+          <a:noFill/>
+        </p:spPr>
+        <p:txBody>
+          <a:bodyPr wrap="square">
+            <a:spAutoFit/>
+          </a:bodyPr>
+          <a:lstStyle/>
+          <a:p>
+            <a:r>
+              <a:rPr sz="1400" i="1">
+                <a:solidFill>
+                  <a:srgbClr val="444444"/>
+                </a:solidFill>
+              </a:rPr>
+              <a:t>Solow-residual decomposition: M0 vs tempo-adjusted (M2) vs joint (M4) for six representative countries.</a:t>
+            </a:r>
+          </a:p>
+        </p:txBody>
+      </p:sp>
+    </p:spTree>
+  </p:cSld>
+  <p:clrMapOvr>
+    <a:masterClrMapping/>
+  </p:clrMapOvr>
+</p:sld>
+</file>
+
+<file path=ppt/slides/slide11.xml><?xml version="1.0" encoding="utf-8"?>
+<p:sld xmlns:a="http://schemas.openxmlformats.org/drawingml/2006/main" xmlns:p="http://schemas.openxmlformats.org/presentationml/2006/main" xmlns:r="http://schemas.openxmlformats.org/officeDocument/2006/relationships">
+  <p:cSld>
+    <p:spTree>
+      <p:nvGrpSpPr>
+        <p:cNvPr id="1" name=""/>
+        <p:cNvGrpSpPr/>
+        <p:nvPr/>
+      </p:nvGrpSpPr>
+      <p:grpSpPr/>
+      <p:sp>
+        <p:nvSpPr>
+          <p:cNvPr id="2" name="TextBox 1"/>
+          <p:cNvSpPr txBox="1"/>
+          <p:nvPr/>
+        </p:nvSpPr>
+        <p:spPr>
+          <a:xfrm>
+            <a:off x="365760" y="182880"/>
+            <a:ext cx="11430000" cy="548640"/>
+          </a:xfrm>
+          <a:prstGeom prst="rect">
+            <a:avLst/>
+          </a:prstGeom>
+          <a:noFill/>
+        </p:spPr>
+        <p:txBody>
+          <a:bodyPr wrap="square">
+            <a:spAutoFit/>
+          </a:bodyPr>
+          <a:lstStyle/>
+          <a:p>
+            <a:r>
+              <a:rPr sz="2000" b="1"/>
+              <a:t>Fig. 11. National wealth: CWON official vs intangible-adjusted produced capital (2019).</a:t>
+            </a:r>
+          </a:p>
+        </p:txBody>
+      </p:sp>
+      <p:pic>
+        <p:nvPicPr>
+          <p:cNvPr id="3" name="Picture 2" descr="fig11_counterfactual_wealth_en.png"/>
+          <p:cNvPicPr>
+            <a:picLocks noChangeAspect="1"/>
+          </p:cNvPicPr>
+          <p:nvPr/>
+        </p:nvPicPr>
+        <p:blipFill>
+          <a:blip r:embed="rId2"/>
+          <a:stretch>
+            <a:fillRect/>
+          </a:stretch>
+        </p:blipFill>
+        <p:spPr>
+          <a:xfrm>
+            <a:off x="1371600" y="1005840"/>
+            <a:ext cx="9418320" cy="5120640"/>
+          </a:xfrm>
+          <a:prstGeom prst="rect">
+            <a:avLst/>
+          </a:prstGeom>
+        </p:spPr>
+      </p:pic>
+      <p:sp>
+        <p:nvSpPr>
+          <p:cNvPr id="4" name="TextBox 3"/>
+          <p:cNvSpPr txBox="1"/>
+          <p:nvPr/>
+        </p:nvSpPr>
+        <p:spPr>
+          <a:xfrm>
+            <a:off x="365760" y="6263640"/>
+            <a:ext cx="11430000" cy="457200"/>
+          </a:xfrm>
+          <a:prstGeom prst="rect">
+            <a:avLst/>
+          </a:prstGeom>
+          <a:noFill/>
+        </p:spPr>
+        <p:txBody>
+          <a:bodyPr wrap="square">
+            <a:spAutoFit/>
+          </a:bodyPr>
+          <a:lstStyle/>
+          <a:p>
+            <a:r>
+              <a:rPr sz="1400" i="1">
+                <a:solidFill>
+                  <a:srgbClr val="444444"/>
+                </a:solidFill>
+              </a:rPr>
+              <a:t>National wealth: CWON official vs intangible-adjusted produced capital (2019).</a:t>
+            </a:r>
+          </a:p>
+        </p:txBody>
+      </p:sp>
+    </p:spTree>
+  </p:cSld>
+  <p:clrMapOvr>
+    <a:masterClrMapping/>
+  </p:clrMapOvr>
+</p:sld>
+</file>
+
 <file path=ppt/slides/slide2.xml><?xml version="1.0" encoding="utf-8"?>
 <p:sld xmlns:a="http://schemas.openxmlformats.org/drawingml/2006/main" xmlns:p="http://schemas.openxmlformats.org/presentationml/2006/main" xmlns:r="http://schemas.openxmlformats.org/officeDocument/2006/relationships">
   <p:cSld>
@@ -3590,6 +3804,422 @@
                 </a:solidFill>
               </a:rPr>
               <a:t>Conceptual diagram of the population-capital tempo correspondence.</a:t>
+            </a:r>
+          </a:p>
+        </p:txBody>
+      </p:sp>
+    </p:spTree>
+  </p:cSld>
+  <p:clrMapOvr>
+    <a:masterClrMapping/>
+  </p:clrMapOvr>
+</p:sld>
+</file>
+
+<file path=ppt/slides/slide6.xml><?xml version="1.0" encoding="utf-8"?>
+<p:sld xmlns:a="http://schemas.openxmlformats.org/drawingml/2006/main" xmlns:p="http://schemas.openxmlformats.org/presentationml/2006/main" xmlns:r="http://schemas.openxmlformats.org/officeDocument/2006/relationships">
+  <p:cSld>
+    <p:spTree>
+      <p:nvGrpSpPr>
+        <p:cNvPr id="1" name=""/>
+        <p:cNvGrpSpPr/>
+        <p:nvPr/>
+      </p:nvGrpSpPr>
+      <p:grpSpPr/>
+      <p:sp>
+        <p:nvSpPr>
+          <p:cNvPr id="2" name="TextBox 1"/>
+          <p:cNvSpPr txBox="1"/>
+          <p:nvPr/>
+        </p:nvSpPr>
+        <p:spPr>
+          <a:xfrm>
+            <a:off x="365760" y="182880"/>
+            <a:ext cx="11430000" cy="548640"/>
+          </a:xfrm>
+          <a:prstGeom prst="rect">
+            <a:avLst/>
+          </a:prstGeom>
+          <a:noFill/>
+        </p:spPr>
+        <p:txBody>
+          <a:bodyPr wrap="square">
+            <a:spAutoFit/>
+          </a:bodyPr>
+          <a:lstStyle/>
+          <a:p>
+            <a:r>
+              <a:rPr sz="2000" b="1"/>
+              <a:t>Fig. 6. Relational PIM diagnostics: rho_2 across 39 countries under M0 vs M4.</a:t>
+            </a:r>
+          </a:p>
+        </p:txBody>
+      </p:sp>
+      <p:pic>
+        <p:nvPicPr>
+          <p:cNvPr id="3" name="Picture 2" descr="fig6_rpim_en.png"/>
+          <p:cNvPicPr>
+            <a:picLocks noChangeAspect="1"/>
+          </p:cNvPicPr>
+          <p:nvPr/>
+        </p:nvPicPr>
+        <p:blipFill>
+          <a:blip r:embed="rId2"/>
+          <a:stretch>
+            <a:fillRect/>
+          </a:stretch>
+        </p:blipFill>
+        <p:spPr>
+          <a:xfrm>
+            <a:off x="1371600" y="1005840"/>
+            <a:ext cx="9418320" cy="5120640"/>
+          </a:xfrm>
+          <a:prstGeom prst="rect">
+            <a:avLst/>
+          </a:prstGeom>
+        </p:spPr>
+      </p:pic>
+      <p:sp>
+        <p:nvSpPr>
+          <p:cNvPr id="4" name="TextBox 3"/>
+          <p:cNvSpPr txBox="1"/>
+          <p:nvPr/>
+        </p:nvSpPr>
+        <p:spPr>
+          <a:xfrm>
+            <a:off x="365760" y="6263640"/>
+            <a:ext cx="11430000" cy="457200"/>
+          </a:xfrm>
+          <a:prstGeom prst="rect">
+            <a:avLst/>
+          </a:prstGeom>
+          <a:noFill/>
+        </p:spPr>
+        <p:txBody>
+          <a:bodyPr wrap="square">
+            <a:spAutoFit/>
+          </a:bodyPr>
+          <a:lstStyle/>
+          <a:p>
+            <a:r>
+              <a:rPr sz="1400" i="1">
+                <a:solidFill>
+                  <a:srgbClr val="444444"/>
+                </a:solidFill>
+              </a:rPr>
+              <a:t>Relational PIM diagnostics: rho_2 across 39 countries under M0 vs M4.</a:t>
+            </a:r>
+          </a:p>
+        </p:txBody>
+      </p:sp>
+    </p:spTree>
+  </p:cSld>
+  <p:clrMapOvr>
+    <a:masterClrMapping/>
+  </p:clrMapOvr>
+</p:sld>
+</file>
+
+<file path=ppt/slides/slide7.xml><?xml version="1.0" encoding="utf-8"?>
+<p:sld xmlns:a="http://schemas.openxmlformats.org/drawingml/2006/main" xmlns:p="http://schemas.openxmlformats.org/presentationml/2006/main" xmlns:r="http://schemas.openxmlformats.org/officeDocument/2006/relationships">
+  <p:cSld>
+    <p:spTree>
+      <p:nvGrpSpPr>
+        <p:cNvPr id="1" name=""/>
+        <p:cNvGrpSpPr/>
+        <p:nvPr/>
+      </p:nvGrpSpPr>
+      <p:grpSpPr/>
+      <p:sp>
+        <p:nvSpPr>
+          <p:cNvPr id="2" name="TextBox 1"/>
+          <p:cNvSpPr txBox="1"/>
+          <p:nvPr/>
+        </p:nvSpPr>
+        <p:spPr>
+          <a:xfrm>
+            <a:off x="365760" y="182880"/>
+            <a:ext cx="11430000" cy="548640"/>
+          </a:xfrm>
+          <a:prstGeom prst="rect">
+            <a:avLst/>
+          </a:prstGeom>
+          <a:noFill/>
+        </p:spPr>
+        <p:txBody>
+          <a:bodyPr wrap="square">
+            <a:spAutoFit/>
+          </a:bodyPr>
+          <a:lstStyle/>
+          <a:p>
+            <a:r>
+              <a:rPr sz="2000" b="1"/>
+              <a:t>Fig. 7. Delta-mu sensitivity: mu_hat under +/-20% depreciation perturbation.</a:t>
+            </a:r>
+          </a:p>
+        </p:txBody>
+      </p:sp>
+      <p:pic>
+        <p:nvPicPr>
+          <p:cNvPr id="3" name="Picture 2" descr="fig7_delta_sensitivity_en.png"/>
+          <p:cNvPicPr>
+            <a:picLocks noChangeAspect="1"/>
+          </p:cNvPicPr>
+          <p:nvPr/>
+        </p:nvPicPr>
+        <p:blipFill>
+          <a:blip r:embed="rId2"/>
+          <a:stretch>
+            <a:fillRect/>
+          </a:stretch>
+        </p:blipFill>
+        <p:spPr>
+          <a:xfrm>
+            <a:off x="1371600" y="1005840"/>
+            <a:ext cx="9418320" cy="5120640"/>
+          </a:xfrm>
+          <a:prstGeom prst="rect">
+            <a:avLst/>
+          </a:prstGeom>
+        </p:spPr>
+      </p:pic>
+      <p:sp>
+        <p:nvSpPr>
+          <p:cNvPr id="4" name="TextBox 3"/>
+          <p:cNvSpPr txBox="1"/>
+          <p:nvPr/>
+        </p:nvSpPr>
+        <p:spPr>
+          <a:xfrm>
+            <a:off x="365760" y="6263640"/>
+            <a:ext cx="11430000" cy="457200"/>
+          </a:xfrm>
+          <a:prstGeom prst="rect">
+            <a:avLst/>
+          </a:prstGeom>
+          <a:noFill/>
+        </p:spPr>
+        <p:txBody>
+          <a:bodyPr wrap="square">
+            <a:spAutoFit/>
+          </a:bodyPr>
+          <a:lstStyle/>
+          <a:p>
+            <a:r>
+              <a:rPr sz="1400" i="1">
+                <a:solidFill>
+                  <a:srgbClr val="444444"/>
+                </a:solidFill>
+              </a:rPr>
+              <a:t>Delta-mu sensitivity: mu_hat under +/-20% depreciation perturbation.</a:t>
+            </a:r>
+          </a:p>
+        </p:txBody>
+      </p:sp>
+    </p:spTree>
+  </p:cSld>
+  <p:clrMapOvr>
+    <a:masterClrMapping/>
+  </p:clrMapOvr>
+</p:sld>
+</file>
+
+<file path=ppt/slides/slide8.xml><?xml version="1.0" encoding="utf-8"?>
+<p:sld xmlns:a="http://schemas.openxmlformats.org/drawingml/2006/main" xmlns:p="http://schemas.openxmlformats.org/presentationml/2006/main" xmlns:r="http://schemas.openxmlformats.org/officeDocument/2006/relationships">
+  <p:cSld>
+    <p:spTree>
+      <p:nvGrpSpPr>
+        <p:cNvPr id="1" name=""/>
+        <p:cNvGrpSpPr/>
+        <p:nvPr/>
+      </p:nvGrpSpPr>
+      <p:grpSpPr/>
+      <p:sp>
+        <p:nvSpPr>
+          <p:cNvPr id="2" name="TextBox 1"/>
+          <p:cNvSpPr txBox="1"/>
+          <p:nvPr/>
+        </p:nvSpPr>
+        <p:spPr>
+          <a:xfrm>
+            <a:off x="365760" y="182880"/>
+            <a:ext cx="11430000" cy="548640"/>
+          </a:xfrm>
+          <a:prstGeom prst="rect">
+            <a:avLst/>
+          </a:prstGeom>
+          <a:noFill/>
+        </p:spPr>
+        <p:txBody>
+          <a:bodyPr wrap="square">
+            <a:spAutoFit/>
+          </a:bodyPr>
+          <a:lstStyle/>
+          <a:p>
+            <a:r>
+              <a:rPr sz="2000" b="1"/>
+              <a:t>Fig. 8. Conditional OOS evaluation: interior-solution vs boundary countries.</a:t>
+            </a:r>
+          </a:p>
+        </p:txBody>
+      </p:sp>
+      <p:pic>
+        <p:nvPicPr>
+          <p:cNvPr id="3" name="Picture 2" descr="fig8_conditional_oos_en.png"/>
+          <p:cNvPicPr>
+            <a:picLocks noChangeAspect="1"/>
+          </p:cNvPicPr>
+          <p:nvPr/>
+        </p:nvPicPr>
+        <p:blipFill>
+          <a:blip r:embed="rId2"/>
+          <a:stretch>
+            <a:fillRect/>
+          </a:stretch>
+        </p:blipFill>
+        <p:spPr>
+          <a:xfrm>
+            <a:off x="1371600" y="1005840"/>
+            <a:ext cx="9418320" cy="5120640"/>
+          </a:xfrm>
+          <a:prstGeom prst="rect">
+            <a:avLst/>
+          </a:prstGeom>
+        </p:spPr>
+      </p:pic>
+      <p:sp>
+        <p:nvSpPr>
+          <p:cNvPr id="4" name="TextBox 3"/>
+          <p:cNvSpPr txBox="1"/>
+          <p:nvPr/>
+        </p:nvSpPr>
+        <p:spPr>
+          <a:xfrm>
+            <a:off x="365760" y="6263640"/>
+            <a:ext cx="11430000" cy="457200"/>
+          </a:xfrm>
+          <a:prstGeom prst="rect">
+            <a:avLst/>
+          </a:prstGeom>
+          <a:noFill/>
+        </p:spPr>
+        <p:txBody>
+          <a:bodyPr wrap="square">
+            <a:spAutoFit/>
+          </a:bodyPr>
+          <a:lstStyle/>
+          <a:p>
+            <a:r>
+              <a:rPr sz="1400" i="1">
+                <a:solidFill>
+                  <a:srgbClr val="444444"/>
+                </a:solidFill>
+              </a:rPr>
+              <a:t>Conditional OOS evaluation: interior-solution vs boundary countries.</a:t>
+            </a:r>
+          </a:p>
+        </p:txBody>
+      </p:sp>
+    </p:spTree>
+  </p:cSld>
+  <p:clrMapOvr>
+    <a:masterClrMapping/>
+  </p:clrMapOvr>
+</p:sld>
+</file>
+
+<file path=ppt/slides/slide9.xml><?xml version="1.0" encoding="utf-8"?>
+<p:sld xmlns:a="http://schemas.openxmlformats.org/drawingml/2006/main" xmlns:p="http://schemas.openxmlformats.org/presentationml/2006/main" xmlns:r="http://schemas.openxmlformats.org/officeDocument/2006/relationships">
+  <p:cSld>
+    <p:spTree>
+      <p:nvGrpSpPr>
+        <p:cNvPr id="1" name=""/>
+        <p:cNvGrpSpPr/>
+        <p:nvPr/>
+      </p:nvGrpSpPr>
+      <p:grpSpPr/>
+      <p:sp>
+        <p:nvSpPr>
+          <p:cNvPr id="2" name="TextBox 1"/>
+          <p:cNvSpPr txBox="1"/>
+          <p:nvPr/>
+        </p:nvSpPr>
+        <p:spPr>
+          <a:xfrm>
+            <a:off x="365760" y="182880"/>
+            <a:ext cx="11430000" cy="548640"/>
+          </a:xfrm>
+          <a:prstGeom prst="rect">
+            <a:avLst/>
+          </a:prstGeom>
+          <a:noFill/>
+        </p:spPr>
+        <p:txBody>
+          <a:bodyPr wrap="square">
+            <a:spAutoFit/>
+          </a:bodyPr>
+          <a:lstStyle/>
+          <a:p>
+            <a:r>
+              <a:rPr sz="2000" b="1"/>
+              <a:t>Fig. 9. Cross-sectional regression of rho_2 on R&amp;D intensity.</a:t>
+            </a:r>
+          </a:p>
+        </p:txBody>
+      </p:sp>
+      <p:pic>
+        <p:nvPicPr>
+          <p:cNvPr id="3" name="Picture 2" descr="fig9_rho2_regression_en.png"/>
+          <p:cNvPicPr>
+            <a:picLocks noChangeAspect="1"/>
+          </p:cNvPicPr>
+          <p:nvPr/>
+        </p:nvPicPr>
+        <p:blipFill>
+          <a:blip r:embed="rId2"/>
+          <a:stretch>
+            <a:fillRect/>
+          </a:stretch>
+        </p:blipFill>
+        <p:spPr>
+          <a:xfrm>
+            <a:off x="1371600" y="1005840"/>
+            <a:ext cx="9418320" cy="5120640"/>
+          </a:xfrm>
+          <a:prstGeom prst="rect">
+            <a:avLst/>
+          </a:prstGeom>
+        </p:spPr>
+      </p:pic>
+      <p:sp>
+        <p:nvSpPr>
+          <p:cNvPr id="4" name="TextBox 3"/>
+          <p:cNvSpPr txBox="1"/>
+          <p:nvPr/>
+        </p:nvSpPr>
+        <p:spPr>
+          <a:xfrm>
+            <a:off x="365760" y="6263640"/>
+            <a:ext cx="11430000" cy="457200"/>
+          </a:xfrm>
+          <a:prstGeom prst="rect">
+            <a:avLst/>
+          </a:prstGeom>
+          <a:noFill/>
+        </p:spPr>
+        <p:txBody>
+          <a:bodyPr wrap="square">
+            <a:spAutoFit/>
+          </a:bodyPr>
+          <a:lstStyle/>
+          <a:p>
+            <a:r>
+              <a:rPr sz="1400" i="1">
+                <a:solidFill>
+                  <a:srgbClr val="444444"/>
+                </a:solidFill>
+              </a:rPr>
+              <a:t>Cross-sectional regression of rho_2 on R&amp;D intensity.</a:t>
             </a:r>
           </a:p>
         </p:txBody>
